--- a/~sasano/lecture/pn2/26/P03.pptx
+++ b/~sasano/lecture/pn2/26/P03.pptx
@@ -334,7 +334,7 @@
             <a:fld id="{E90ED720-0104-4369-84BC-D37694168613}" type="datetimeFigureOut">
               <a:rPr kumimoji="1" lang="ja-JP" altLang="en-US" smtClean="0"/>
               <a:pPr/>
-              <a:t>2025/10/7</a:t>
+              <a:t>2026/9/28</a:t>
             </a:fld>
             <a:endParaRPr kumimoji="1" lang="ja-JP" altLang="en-US"/>
           </a:p>
@@ -536,7 +536,7 @@
             <a:fld id="{E90ED720-0104-4369-84BC-D37694168613}" type="datetimeFigureOut">
               <a:rPr kumimoji="1" lang="ja-JP" altLang="en-US" smtClean="0"/>
               <a:pPr/>
-              <a:t>2025/10/7</a:t>
+              <a:t>2026/9/28</a:t>
             </a:fld>
             <a:endParaRPr kumimoji="1" lang="ja-JP" altLang="en-US"/>
           </a:p>
@@ -748,7 +748,7 @@
             <a:fld id="{E90ED720-0104-4369-84BC-D37694168613}" type="datetimeFigureOut">
               <a:rPr kumimoji="1" lang="ja-JP" altLang="en-US" smtClean="0"/>
               <a:pPr/>
-              <a:t>2025/10/7</a:t>
+              <a:t>2026/9/28</a:t>
             </a:fld>
             <a:endParaRPr kumimoji="1" lang="ja-JP" altLang="en-US"/>
           </a:p>
@@ -950,7 +950,7 @@
             <a:fld id="{E90ED720-0104-4369-84BC-D37694168613}" type="datetimeFigureOut">
               <a:rPr kumimoji="1" lang="ja-JP" altLang="en-US" smtClean="0"/>
               <a:pPr/>
-              <a:t>2025/10/7</a:t>
+              <a:t>2026/9/28</a:t>
             </a:fld>
             <a:endParaRPr kumimoji="1" lang="ja-JP" altLang="en-US"/>
           </a:p>
@@ -1197,7 +1197,7 @@
             <a:fld id="{E90ED720-0104-4369-84BC-D37694168613}" type="datetimeFigureOut">
               <a:rPr kumimoji="1" lang="ja-JP" altLang="en-US" smtClean="0"/>
               <a:pPr/>
-              <a:t>2025/10/7</a:t>
+              <a:t>2026/9/28</a:t>
             </a:fld>
             <a:endParaRPr kumimoji="1" lang="ja-JP" altLang="en-US"/>
           </a:p>
@@ -1548,7 +1548,7 @@
             <a:fld id="{E90ED720-0104-4369-84BC-D37694168613}" type="datetimeFigureOut">
               <a:rPr kumimoji="1" lang="ja-JP" altLang="en-US" smtClean="0"/>
               <a:pPr/>
-              <a:t>2025/10/7</a:t>
+              <a:t>2026/9/28</a:t>
             </a:fld>
             <a:endParaRPr kumimoji="1" lang="ja-JP" altLang="en-US"/>
           </a:p>
@@ -2033,7 +2033,7 @@
             <a:fld id="{E90ED720-0104-4369-84BC-D37694168613}" type="datetimeFigureOut">
               <a:rPr kumimoji="1" lang="ja-JP" altLang="en-US" smtClean="0"/>
               <a:pPr/>
-              <a:t>2025/10/7</a:t>
+              <a:t>2026/9/28</a:t>
             </a:fld>
             <a:endParaRPr kumimoji="1" lang="ja-JP" altLang="en-US"/>
           </a:p>
@@ -2152,7 +2152,7 @@
             <a:fld id="{E90ED720-0104-4369-84BC-D37694168613}" type="datetimeFigureOut">
               <a:rPr kumimoji="1" lang="ja-JP" altLang="en-US" smtClean="0"/>
               <a:pPr/>
-              <a:t>2025/10/7</a:t>
+              <a:t>2026/9/28</a:t>
             </a:fld>
             <a:endParaRPr kumimoji="1" lang="ja-JP" altLang="en-US"/>
           </a:p>
@@ -2249,7 +2249,7 @@
             <a:fld id="{E90ED720-0104-4369-84BC-D37694168613}" type="datetimeFigureOut">
               <a:rPr kumimoji="1" lang="ja-JP" altLang="en-US" smtClean="0"/>
               <a:pPr/>
-              <a:t>2025/10/7</a:t>
+              <a:t>2026/9/28</a:t>
             </a:fld>
             <a:endParaRPr kumimoji="1" lang="ja-JP" altLang="en-US"/>
           </a:p>
@@ -2558,7 +2558,7 @@
             <a:fld id="{E90ED720-0104-4369-84BC-D37694168613}" type="datetimeFigureOut">
               <a:rPr kumimoji="1" lang="ja-JP" altLang="en-US" smtClean="0"/>
               <a:pPr/>
-              <a:t>2025/10/7</a:t>
+              <a:t>2026/9/28</a:t>
             </a:fld>
             <a:endParaRPr kumimoji="1" lang="ja-JP" altLang="en-US"/>
           </a:p>
@@ -2812,7 +2812,7 @@
             <a:fld id="{E90ED720-0104-4369-84BC-D37694168613}" type="datetimeFigureOut">
               <a:rPr kumimoji="1" lang="ja-JP" altLang="en-US" smtClean="0"/>
               <a:pPr/>
-              <a:t>2025/10/7</a:t>
+              <a:t>2026/9/28</a:t>
             </a:fld>
             <a:endParaRPr kumimoji="1" lang="ja-JP" altLang="en-US"/>
           </a:p>
@@ -3057,7 +3057,7 @@
             <a:fld id="{E90ED720-0104-4369-84BC-D37694168613}" type="datetimeFigureOut">
               <a:rPr kumimoji="1" lang="ja-JP" altLang="en-US" smtClean="0"/>
               <a:pPr/>
-              <a:t>2025/10/7</a:t>
+              <a:t>2026/9/28</a:t>
             </a:fld>
             <a:endParaRPr kumimoji="1" lang="ja-JP" altLang="en-US"/>
           </a:p>
@@ -3528,8 +3528,8 @@
         </p:nvSpPr>
         <p:spPr>
           <a:xfrm>
-            <a:off x="2571736" y="5286388"/>
-            <a:ext cx="4112023" cy="584775"/>
+            <a:off x="3692139" y="5373216"/>
+            <a:ext cx="1688283" cy="584775"/>
           </a:xfrm>
           <a:prstGeom prst="rect">
             <a:avLst/>
@@ -3541,9 +3541,14 @@
           </a:bodyPr>
           <a:lstStyle/>
           <a:p>
+            <a:pPr algn="ctr"/>
+            <a:r>
+              <a:rPr lang="ja-JP" altLang="en-US" sz="3200"/>
+              <a:t>篠埜　</a:t>
+            </a:r>
             <a:r>
               <a:rPr lang="ja-JP" altLang="en-US" sz="3200" dirty="0"/>
-              <a:t>情報工学科    篠埜　功</a:t>
+              <a:t>功</a:t>
             </a:r>
           </a:p>
         </p:txBody>
